--- a/docs/Burnout-Swimlanes.pptx
+++ b/docs/Burnout-Swimlanes.pptx
@@ -502,22 +502,22 @@
           <a:lstStyle/>
           <a:p>
             <a:r>
-              <a:t>DETERMINISTIC LANE</a:t>
-            </a:r>
-          </a:p>
-          <a:p>
-            <a:r>
-              <a:t>1. Ingestion — Issues loaded from in-memory cache (populated by seed, sync, or MCP).</a:t>
-            </a:r>
-          </a:p>
-          <a:p>
-            <a:r>
-              <a:t>2. Chaos Metrics — Runs FIRST. Five boolean signals each worth 2 points: mystery meat ≥ 3, urgent ≥ 3, context switching ≥ 6, after-hours, label sprawl ≥ 12. Score 0–10.</a:t>
-            </a:r>
-          </a:p>
-          <a:p>
-            <a:r>
-              <a:t>3. Classify + Comply — Runs SECOND. IssueClassifierService sorts issues into DEEP_WORK / QUICK_WIN / MAINTENANCE / DEFERRED (first match wins). ComplianceService checks 8 violation rules (score 100 → 0). 3-3-3 day plan built here too (classification runs twice).</a:t>
+              <a:t>DETERMINISTIC LANE — metrics calculated on every checkin / flamegraph / reshape</a:t>
+            </a:r>
+          </a:p>
+          <a:p>
+            <a:r>
+              <a:t>1. Ingestion — Issues loaded from in-memory IssueCache (populated by /demo/api/seed, /demo/api/sync, or MCP sync_issues).</a:t>
+            </a:r>
+          </a:p>
+          <a:p>
+            <a:r>
+              <a:t>2. Chaos Metrics — ChaosMetricsService runs FIRST. Five binary signals each worth 2 points: mystery meat ≥ 3, urgent ≥ 3, context switching ≥ 6, after-hours, label sprawl ≥ 12. Score 0–10.</a:t>
+            </a:r>
+          </a:p>
+          <a:p>
+            <a:r>
+              <a:t>3. Classify + Comply — IssueClassifierService sorts issues into DEEP_WORK / QUICK_WIN / MAINTENANCE / DEFERRED (first-match-wins). ComplianceService checks 8 violation rules (score 100 → 0). 3-3-3 day plan built here.</a:t>
             </a:r>
           </a:p>
           <a:p>
@@ -528,12 +528,72 @@
           <a:p/>
           <a:p>
             <a:r>
-              <a:t>AI AGENTS LANE (reshape only — checkin and flamegraph skip this)</a:t>
-            </a:r>
-          </a:p>
-          <a:p>
-            <a:r>
-              <a:t>5. Supervisor receives the fully-calculated WorldState and orchestrates 5 sub-agents. ClassifyAgent RECLASSIFIES issues by adding labels (quick-win, deep-work, maintenance). DeferAgent adds deferred + next-sprint. DelegateAgent adds delegated + needs-owner. ScopeAgent adds needs-scope + blocked. WellnessAgent suggests breaks. Every agent has a deterministic fallback when LLM is unavailable.</a:t>
+              <a:t>RESHAPE LANE — only runs on POST /demo/api/reshape (and MCP reshape_day)</a:t>
+            </a:r>
+          </a:p>
+          <a:p>
+            <a:r>
+              <a:t>5a. DETERMINISTIC PRE-PASS — runs in BurnoutSupervisorService BEFORE any LLM call:</a:t>
+            </a:r>
+          </a:p>
+          <a:p>
+            <a:r>
+              <a:t>    • triageUrgent(n) is invoked directly for every unassigned-urgent issue, stripping       `urgent` / `priority:critical` / `priority:high` and adding `triaged,backlog`.</a:t>
+            </a:r>
+          </a:p>
+          <a:p>
+            <a:r>
+              <a:t>    • defuseChaosInputs(clock) replaces empty bodies with a scope-pending placeholder       and normalises after-hours / touched-today timestamps to 10:00 in the demo clock zone.</a:t>
+            </a:r>
+          </a:p>
+          <a:p>
+            <a:r>
+              <a:t>    These two calls guarantee the chaos score drops on every reshape, regardless of which     sub-agents the LLM picks. The supervisor is told the unassigned-urgent issues are     already triaged and to leave them alone.</a:t>
+            </a:r>
+          </a:p>
+          <a:p>
+            <a:r>
+              <a:t>5b. LANGCHAIN4J SUPERVISOR — AgenticServices.supervisorBuilder() with maxAgentsInvocations=15     and SupervisorResponseStrategy.SUMMARY. Six sub-agents are registered:</a:t>
+            </a:r>
+          </a:p>
+          <a:p>
+            <a:r>
+              <a:t>    • TriageAgent (final cleanup if pre-pass missed anything)</a:t>
+            </a:r>
+          </a:p>
+          <a:p>
+            <a:r>
+              <a:t>    • DeferAgent (defer + next-sprint, unassign)</a:t>
+            </a:r>
+          </a:p>
+          <a:p>
+            <a:r>
+              <a:t>    • DelegateAgent (delegate + needs-owner, unassign)</a:t>
+            </a:r>
+          </a:p>
+          <a:p>
+            <a:r>
+              <a:t>    • ClassifyAgent (quick-win / deep-work / maintenance labels for the 3-3-3 plan)</a:t>
+            </a:r>
+          </a:p>
+          <a:p>
+            <a:r>
+              <a:t>    • ScopeAgent (needs-scope + blocked)</a:t>
+            </a:r>
+          </a:p>
+          <a:p>
+            <a:r>
+              <a:t>    • WellnessAgent (suggestBreak, slowIntake, blockCalendarTime)</a:t>
+            </a:r>
+          </a:p>
+          <a:p>
+            <a:r>
+              <a:t>    Every agent has a deterministic fallback if the LLM is unavailable.</a:t>
+            </a:r>
+          </a:p>
+          <a:p>
+            <a:r>
+              <a:t>5c. LABEL MUTATIONS — Each @Tool method on BurnoutMutationTool emits records from the     sealed GitHubAction interface: AddLabels, RemoveLabels, Comment, Unassign, SetBody,     SetUpdatedAt. Mutations are buffered, not applied directly to GitHub.</a:t>
             </a:r>
           </a:p>
           <a:p/>
@@ -544,12 +604,12 @@
           </a:p>
           <a:p>
             <a:r>
-              <a:t>6a. Apply Mutations — Agent's label changes written to IssueCache (not GitHub directly).</a:t>
-            </a:r>
-          </a:p>
-          <a:p>
-            <a:r>
-              <a:t>6b. Recalculate — The ENTIRE deterministic pipeline reruns on mutated issues. Chaos recalculated, classification re-runs with new labels → different buckets, new stress score computed. This is the AFTER score (how 100→10 happens).</a:t>
+              <a:t>6a. Apply Mutations — DemoFlamegraphController.applyMutationsToIssues writes the buffered     label/body/timestamp changes to the in-memory IssueCache (not to GitHub).</a:t>
+            </a:r>
+          </a:p>
+          <a:p>
+            <a:r>
+              <a:t>6b. Recalculate — The ENTIRE deterministic pipeline reruns on the mutated issues.     Chaos drops (urgent stripped, bodies filled, timestamps normalised), classification     re-buckets with the new labels, new stress score is computed. This is the AFTER score     (~58 → ~8 in the demo).</a:t>
             </a:r>
           </a:p>
           <a:p>
@@ -559,7 +619,7 @@
           </a:p>
           <a:p>
             <a:r>
-              <a:t>6d. Persist Snapshot — JPA StressSnapshot with all 6 components + optional self-report. Powers the Study Dashboard trend charts.</a:t>
+              <a:t>6d. Persist Snapshot — JPA StressSnapshot with all 6 components + optional self-report.     Powers the Study Dashboard trend charts.</a:t>
             </a:r>
           </a:p>
         </p:txBody>
@@ -3623,8 +3683,8 @@
         </p:nvSpPr>
         <p:spPr>
           <a:xfrm>
-            <a:off x="2103120" y="1097280"/>
-            <a:ext cx="9601200" cy="1417320"/>
+            <a:off x="2103120" y="1005840"/>
+            <a:ext cx="9601200" cy="1371600"/>
           </a:xfrm>
           <a:prstGeom prst="rect">
             <a:avLst/>
@@ -3669,8 +3729,8 @@
         </p:nvSpPr>
         <p:spPr>
           <a:xfrm>
-            <a:off x="2103120" y="2743200"/>
-            <a:ext cx="9601200" cy="1234440"/>
+            <a:off x="2103120" y="2606040"/>
+            <a:ext cx="9601200" cy="1691640"/>
           </a:xfrm>
           <a:prstGeom prst="rect">
             <a:avLst/>
@@ -3715,8 +3775,8 @@
         </p:nvSpPr>
         <p:spPr>
           <a:xfrm>
-            <a:off x="2103120" y="4206240"/>
-            <a:ext cx="9601200" cy="1234440"/>
+            <a:off x="2103120" y="4526280"/>
+            <a:ext cx="9601200" cy="1188720"/>
           </a:xfrm>
           <a:prstGeom prst="rect">
             <a:avLst/>
@@ -3761,7 +3821,7 @@
         </p:nvSpPr>
         <p:spPr>
           <a:xfrm>
-            <a:off x="182880" y="1554480"/>
+            <a:off x="182880" y="1417320"/>
             <a:ext cx="1737360" cy="274320"/>
           </a:xfrm>
           <a:prstGeom prst="rect">
@@ -3803,7 +3863,49 @@
         </p:nvSpPr>
         <p:spPr>
           <a:xfrm>
-            <a:off x="182880" y="3063240"/>
+            <a:off x="182880" y="1691640"/>
+            <a:ext cx="1737360" cy="228600"/>
+          </a:xfrm>
+          <a:prstGeom prst="rect">
+            <a:avLst/>
+          </a:prstGeom>
+          <a:noFill/>
+        </p:spPr>
+        <p:txBody>
+          <a:bodyPr wrap="square">
+            <a:spAutoFit/>
+          </a:bodyPr>
+          <a:lstStyle/>
+          <a:p>
+            <a:pPr algn="ctr">
+              <a:spcBef>
+                <a:spcPts val="0"/>
+              </a:spcBef>
+              <a:spcAft>
+                <a:spcPts val="0"/>
+              </a:spcAft>
+              <a:defRPr sz="1100" b="0">
+                <a:solidFill>
+                  <a:srgbClr val="94A3B8"/>
+                </a:solidFill>
+                <a:latin typeface="Segoe UI"/>
+              </a:defRPr>
+            </a:pPr>
+            <a:r>
+              <a:t>(metrics)</a:t>
+            </a:r>
+          </a:p>
+        </p:txBody>
+      </p:sp>
+      <p:sp>
+        <p:nvSpPr>
+          <p:cNvPr id="8" name="TextBox 7"/>
+          <p:cNvSpPr txBox="1"/>
+          <p:nvPr/>
+        </p:nvSpPr>
+        <p:spPr>
+          <a:xfrm>
+            <a:off x="182880" y="3108960"/>
             <a:ext cx="1737360" cy="274320"/>
           </a:xfrm>
           <a:prstGeom prst="rect">
@@ -3832,20 +3934,20 @@
               </a:defRPr>
             </a:pPr>
             <a:r>
-              <a:t>AI AGENTS</a:t>
-            </a:r>
-          </a:p>
-        </p:txBody>
-      </p:sp>
-      <p:sp>
-        <p:nvSpPr>
-          <p:cNvPr id="8" name="TextBox 7"/>
+              <a:t>RESHAPE</a:t>
+            </a:r>
+          </a:p>
+        </p:txBody>
+      </p:sp>
+      <p:sp>
+        <p:nvSpPr>
+          <p:cNvPr id="9" name="TextBox 8"/>
           <p:cNvSpPr txBox="1"/>
           <p:nvPr/>
         </p:nvSpPr>
         <p:spPr>
           <a:xfrm>
-            <a:off x="182880" y="3337560"/>
+            <a:off x="182880" y="3383280"/>
             <a:ext cx="1737360" cy="228600"/>
           </a:xfrm>
           <a:prstGeom prst="rect">
@@ -3874,20 +3976,20 @@
               </a:defRPr>
             </a:pPr>
             <a:r>
-              <a:t>(reshape only)</a:t>
-            </a:r>
-          </a:p>
-        </p:txBody>
-      </p:sp>
-      <p:sp>
-        <p:nvSpPr>
-          <p:cNvPr id="9" name="TextBox 8"/>
+              <a:t>(pre-pass + AI)</a:t>
+            </a:r>
+          </a:p>
+        </p:txBody>
+      </p:sp>
+      <p:sp>
+        <p:nvSpPr>
+          <p:cNvPr id="10" name="TextBox 9"/>
           <p:cNvSpPr txBox="1"/>
           <p:nvPr/>
         </p:nvSpPr>
         <p:spPr>
           <a:xfrm>
-            <a:off x="182880" y="4617720"/>
+            <a:off x="182880" y="4892040"/>
             <a:ext cx="1737360" cy="274320"/>
           </a:xfrm>
           <a:prstGeom prst="rect">
@@ -3923,13 +4025,13 @@
       </p:sp>
       <p:sp>
         <p:nvSpPr>
-          <p:cNvPr id="10" name="Rounded Rectangle 9"/>
+          <p:cNvPr id="11" name="Rounded Rectangle 10"/>
           <p:cNvSpPr/>
           <p:nvPr/>
         </p:nvSpPr>
         <p:spPr>
           <a:xfrm>
-            <a:off x="2377440" y="1417320"/>
+            <a:off x="2377440" y="1298448"/>
             <a:ext cx="1965960" cy="777240"/>
           </a:xfrm>
           <a:prstGeom prst="roundRect">
@@ -3971,13 +4073,13 @@
       </p:sp>
       <p:sp>
         <p:nvSpPr>
-          <p:cNvPr id="11" name="TextBox 10"/>
+          <p:cNvPr id="12" name="TextBox 11"/>
           <p:cNvSpPr txBox="1"/>
           <p:nvPr/>
         </p:nvSpPr>
         <p:spPr>
           <a:xfrm>
-            <a:off x="2377440" y="1618488"/>
+            <a:off x="2377440" y="1499616"/>
             <a:ext cx="1965960" cy="365760"/>
           </a:xfrm>
           <a:prstGeom prst="rect">
@@ -4013,13 +4115,13 @@
       </p:sp>
       <p:sp>
         <p:nvSpPr>
-          <p:cNvPr id="12" name="Rounded Rectangle 11"/>
+          <p:cNvPr id="13" name="Rounded Rectangle 12"/>
           <p:cNvSpPr/>
           <p:nvPr/>
         </p:nvSpPr>
         <p:spPr>
           <a:xfrm>
-            <a:off x="4754880" y="1417320"/>
+            <a:off x="4754880" y="1298448"/>
             <a:ext cx="1965960" cy="777240"/>
           </a:xfrm>
           <a:prstGeom prst="roundRect">
@@ -4061,13 +4163,13 @@
       </p:sp>
       <p:sp>
         <p:nvSpPr>
-          <p:cNvPr id="13" name="TextBox 12"/>
+          <p:cNvPr id="14" name="TextBox 13"/>
           <p:cNvSpPr txBox="1"/>
           <p:nvPr/>
         </p:nvSpPr>
         <p:spPr>
           <a:xfrm>
-            <a:off x="4754880" y="1618488"/>
+            <a:off x="4754880" y="1499616"/>
             <a:ext cx="1965960" cy="365760"/>
           </a:xfrm>
           <a:prstGeom prst="rect">
@@ -4103,13 +4205,13 @@
       </p:sp>
       <p:sp>
         <p:nvSpPr>
-          <p:cNvPr id="14" name="Rounded Rectangle 13"/>
+          <p:cNvPr id="15" name="Rounded Rectangle 14"/>
           <p:cNvSpPr/>
           <p:nvPr/>
         </p:nvSpPr>
         <p:spPr>
           <a:xfrm>
-            <a:off x="7132320" y="1417320"/>
+            <a:off x="7132320" y="1298448"/>
             <a:ext cx="1965960" cy="777240"/>
           </a:xfrm>
           <a:prstGeom prst="roundRect">
@@ -4151,13 +4253,13 @@
       </p:sp>
       <p:sp>
         <p:nvSpPr>
-          <p:cNvPr id="15" name="TextBox 14"/>
+          <p:cNvPr id="16" name="TextBox 15"/>
           <p:cNvSpPr txBox="1"/>
           <p:nvPr/>
         </p:nvSpPr>
         <p:spPr>
           <a:xfrm>
-            <a:off x="7132320" y="1618488"/>
+            <a:off x="7132320" y="1499616"/>
             <a:ext cx="1965960" cy="365760"/>
           </a:xfrm>
           <a:prstGeom prst="rect">
@@ -4193,13 +4295,13 @@
       </p:sp>
       <p:sp>
         <p:nvSpPr>
-          <p:cNvPr id="16" name="Rounded Rectangle 15"/>
+          <p:cNvPr id="17" name="Rounded Rectangle 16"/>
           <p:cNvSpPr/>
           <p:nvPr/>
         </p:nvSpPr>
         <p:spPr>
           <a:xfrm>
-            <a:off x="9509760" y="1417320"/>
+            <a:off x="9509760" y="1298448"/>
             <a:ext cx="1965960" cy="777240"/>
           </a:xfrm>
           <a:prstGeom prst="roundRect">
@@ -4241,13 +4343,13 @@
       </p:sp>
       <p:sp>
         <p:nvSpPr>
-          <p:cNvPr id="17" name="TextBox 16"/>
+          <p:cNvPr id="18" name="TextBox 17"/>
           <p:cNvSpPr txBox="1"/>
           <p:nvPr/>
         </p:nvSpPr>
         <p:spPr>
           <a:xfrm>
-            <a:off x="9509760" y="1618488"/>
+            <a:off x="9509760" y="1499616"/>
             <a:ext cx="1965960" cy="365760"/>
           </a:xfrm>
           <a:prstGeom prst="rect">
@@ -4283,13 +4385,13 @@
       </p:sp>
       <p:sp>
         <p:nvSpPr>
-          <p:cNvPr id="18" name="Right Arrow 17"/>
+          <p:cNvPr id="19" name="Right Arrow 18"/>
           <p:cNvSpPr/>
           <p:nvPr/>
         </p:nvSpPr>
         <p:spPr>
           <a:xfrm>
-            <a:off x="4389120" y="1714500"/>
+            <a:off x="4389120" y="1595628"/>
             <a:ext cx="320040" cy="182880"/>
           </a:xfrm>
           <a:prstGeom prst="rightArrow">
@@ -4327,13 +4429,13 @@
       </p:sp>
       <p:sp>
         <p:nvSpPr>
-          <p:cNvPr id="19" name="Right Arrow 18"/>
+          <p:cNvPr id="20" name="Right Arrow 19"/>
           <p:cNvSpPr/>
           <p:nvPr/>
         </p:nvSpPr>
         <p:spPr>
           <a:xfrm>
-            <a:off x="6766560" y="1714500"/>
+            <a:off x="6766560" y="1595628"/>
             <a:ext cx="320040" cy="182880"/>
           </a:xfrm>
           <a:prstGeom prst="rightArrow">
@@ -4371,13 +4473,13 @@
       </p:sp>
       <p:sp>
         <p:nvSpPr>
-          <p:cNvPr id="20" name="Right Arrow 19"/>
+          <p:cNvPr id="21" name="Right Arrow 20"/>
           <p:cNvSpPr/>
           <p:nvPr/>
         </p:nvSpPr>
         <p:spPr>
           <a:xfrm>
-            <a:off x="9144000" y="1714500"/>
+            <a:off x="9144000" y="1595628"/>
             <a:ext cx="320040" cy="182880"/>
           </a:xfrm>
           <a:prstGeom prst="rightArrow">
@@ -4415,14 +4517,14 @@
       </p:sp>
       <p:sp>
         <p:nvSpPr>
-          <p:cNvPr id="21" name="Down Arrow 20"/>
+          <p:cNvPr id="22" name="Down Arrow 21"/>
           <p:cNvSpPr/>
           <p:nvPr/>
         </p:nvSpPr>
         <p:spPr>
           <a:xfrm>
-            <a:off x="10401300" y="2240280"/>
-            <a:ext cx="182880" cy="777240"/>
+            <a:off x="10401300" y="2121408"/>
+            <a:ext cx="182880" cy="758952"/>
           </a:xfrm>
           <a:prstGeom prst="downArrow">
             <a:avLst/>
@@ -4459,14 +4561,230 @@
       </p:sp>
       <p:sp>
         <p:nvSpPr>
-          <p:cNvPr id="22" name="Rounded Rectangle 21"/>
+          <p:cNvPr id="23" name="Rounded Rectangle 22"/>
           <p:cNvSpPr/>
           <p:nvPr/>
         </p:nvSpPr>
         <p:spPr>
           <a:xfrm>
-            <a:off x="4846320" y="2971800"/>
-            <a:ext cx="4114800" cy="777240"/>
+            <a:off x="2560320" y="2880360"/>
+            <a:ext cx="2651760" cy="1234440"/>
+          </a:xfrm>
+          <a:prstGeom prst="roundRect">
+            <a:avLst>
+              <a:gd name="adj" fmla="val 15000"/>
+            </a:avLst>
+          </a:prstGeom>
+          <a:solidFill>
+            <a:srgbClr val="092A26"/>
+          </a:solidFill>
+          <a:ln w="19050">
+            <a:solidFill>
+              <a:srgbClr val="2DD4BF"/>
+            </a:solidFill>
+          </a:ln>
+          <a:effectLst/>
+        </p:spPr>
+        <p:style>
+          <a:lnRef idx="1">
+            <a:schemeClr val="accent1"/>
+          </a:lnRef>
+          <a:fillRef idx="3">
+            <a:schemeClr val="accent1"/>
+          </a:fillRef>
+          <a:effectRef idx="2">
+            <a:schemeClr val="accent1"/>
+          </a:effectRef>
+          <a:fontRef idx="minor">
+            <a:schemeClr val="lt1"/>
+          </a:fontRef>
+        </p:style>
+        <p:txBody>
+          <a:bodyPr rtlCol="0" anchor="ctr"/>
+          <a:lstStyle/>
+          <a:p>
+            <a:pPr algn="ctr"/>
+          </a:p>
+        </p:txBody>
+      </p:sp>
+      <p:sp>
+        <p:nvSpPr>
+          <p:cNvPr id="24" name="TextBox 23"/>
+          <p:cNvSpPr txBox="1"/>
+          <p:nvPr/>
+        </p:nvSpPr>
+        <p:spPr>
+          <a:xfrm>
+            <a:off x="2560320" y="2971800"/>
+            <a:ext cx="2651760" cy="274320"/>
+          </a:xfrm>
+          <a:prstGeom prst="rect">
+            <a:avLst/>
+          </a:prstGeom>
+          <a:noFill/>
+        </p:spPr>
+        <p:txBody>
+          <a:bodyPr wrap="square">
+            <a:spAutoFit/>
+          </a:bodyPr>
+          <a:lstStyle/>
+          <a:p>
+            <a:pPr algn="ctr">
+              <a:spcBef>
+                <a:spcPts val="0"/>
+              </a:spcBef>
+              <a:spcAft>
+                <a:spcPts val="0"/>
+              </a:spcAft>
+              <a:defRPr sz="1100" b="1">
+                <a:solidFill>
+                  <a:srgbClr val="2DD4BF"/>
+                </a:solidFill>
+                <a:latin typeface="Segoe UI"/>
+              </a:defRPr>
+            </a:pPr>
+            <a:r>
+              <a:t>DETERMINISTIC PRE-PASS</a:t>
+            </a:r>
+          </a:p>
+        </p:txBody>
+      </p:sp>
+      <p:sp>
+        <p:nvSpPr>
+          <p:cNvPr id="25" name="TextBox 24"/>
+          <p:cNvSpPr txBox="1"/>
+          <p:nvPr/>
+        </p:nvSpPr>
+        <p:spPr>
+          <a:xfrm>
+            <a:off x="2560320" y="3264408"/>
+            <a:ext cx="2651760" cy="320040"/>
+          </a:xfrm>
+          <a:prstGeom prst="rect">
+            <a:avLst/>
+          </a:prstGeom>
+          <a:noFill/>
+        </p:spPr>
+        <p:txBody>
+          <a:bodyPr wrap="square">
+            <a:spAutoFit/>
+          </a:bodyPr>
+          <a:lstStyle/>
+          <a:p>
+            <a:pPr algn="ctr">
+              <a:spcBef>
+                <a:spcPts val="0"/>
+              </a:spcBef>
+              <a:spcAft>
+                <a:spcPts val="0"/>
+              </a:spcAft>
+              <a:defRPr sz="1400" b="1">
+                <a:solidFill>
+                  <a:srgbClr val="F8FAFC"/>
+                </a:solidFill>
+                <a:latin typeface="Segoe UI"/>
+              </a:defRPr>
+            </a:pPr>
+            <a:r>
+              <a:t>triageUrgent(n)</a:t>
+            </a:r>
+          </a:p>
+        </p:txBody>
+      </p:sp>
+      <p:sp>
+        <p:nvSpPr>
+          <p:cNvPr id="26" name="TextBox 25"/>
+          <p:cNvSpPr txBox="1"/>
+          <p:nvPr/>
+        </p:nvSpPr>
+        <p:spPr>
+          <a:xfrm>
+            <a:off x="2560320" y="3566160"/>
+            <a:ext cx="2651760" cy="320040"/>
+          </a:xfrm>
+          <a:prstGeom prst="rect">
+            <a:avLst/>
+          </a:prstGeom>
+          <a:noFill/>
+        </p:spPr>
+        <p:txBody>
+          <a:bodyPr wrap="square">
+            <a:spAutoFit/>
+          </a:bodyPr>
+          <a:lstStyle/>
+          <a:p>
+            <a:pPr algn="ctr">
+              <a:spcBef>
+                <a:spcPts val="0"/>
+              </a:spcBef>
+              <a:spcAft>
+                <a:spcPts val="0"/>
+              </a:spcAft>
+              <a:defRPr sz="1400" b="1">
+                <a:solidFill>
+                  <a:srgbClr val="F8FAFC"/>
+                </a:solidFill>
+                <a:latin typeface="Segoe UI"/>
+              </a:defRPr>
+            </a:pPr>
+            <a:r>
+              <a:t>defuseChaosInputs(clock)</a:t>
+            </a:r>
+          </a:p>
+        </p:txBody>
+      </p:sp>
+      <p:sp>
+        <p:nvSpPr>
+          <p:cNvPr id="27" name="TextBox 26"/>
+          <p:cNvSpPr txBox="1"/>
+          <p:nvPr/>
+        </p:nvSpPr>
+        <p:spPr>
+          <a:xfrm>
+            <a:off x="2560320" y="3840480"/>
+            <a:ext cx="2651760" cy="228600"/>
+          </a:xfrm>
+          <a:prstGeom prst="rect">
+            <a:avLst/>
+          </a:prstGeom>
+          <a:noFill/>
+        </p:spPr>
+        <p:txBody>
+          <a:bodyPr wrap="square">
+            <a:spAutoFit/>
+          </a:bodyPr>
+          <a:lstStyle/>
+          <a:p>
+            <a:pPr algn="ctr">
+              <a:spcBef>
+                <a:spcPts val="0"/>
+              </a:spcBef>
+              <a:spcAft>
+                <a:spcPts val="0"/>
+              </a:spcAft>
+              <a:defRPr sz="1000" b="0">
+                <a:solidFill>
+                  <a:srgbClr val="94A3B8"/>
+                </a:solidFill>
+                <a:latin typeface="Segoe UI"/>
+              </a:defRPr>
+            </a:pPr>
+            <a:r>
+              <a:t>no LLM — guarantees drop</a:t>
+            </a:r>
+          </a:p>
+        </p:txBody>
+      </p:sp>
+      <p:sp>
+        <p:nvSpPr>
+          <p:cNvPr id="28" name="Rounded Rectangle 27"/>
+          <p:cNvSpPr/>
+          <p:nvPr/>
+        </p:nvSpPr>
+        <p:spPr>
+          <a:xfrm>
+            <a:off x="5486400" y="2880360"/>
+            <a:ext cx="3291840" cy="1234440"/>
           </a:xfrm>
           <a:prstGeom prst="roundRect">
             <a:avLst>
@@ -4507,14 +4825,14 @@
       </p:sp>
       <p:sp>
         <p:nvSpPr>
-          <p:cNvPr id="23" name="TextBox 22"/>
+          <p:cNvPr id="29" name="TextBox 28"/>
           <p:cNvSpPr txBox="1"/>
           <p:nvPr/>
         </p:nvSpPr>
         <p:spPr>
           <a:xfrm>
-            <a:off x="4846320" y="3172968"/>
-            <a:ext cx="4114800" cy="365760"/>
+            <a:off x="5486400" y="2971800"/>
+            <a:ext cx="3291840" cy="274320"/>
           </a:xfrm>
           <a:prstGeom prst="rect">
             <a:avLst/>
@@ -4534,7 +4852,49 @@
               <a:spcAft>
                 <a:spcPts val="0"/>
               </a:spcAft>
-              <a:defRPr sz="1700" b="1">
+              <a:defRPr sz="1100" b="1">
+                <a:solidFill>
+                  <a:srgbClr val="FB7185"/>
+                </a:solidFill>
+                <a:latin typeface="Segoe UI"/>
+              </a:defRPr>
+            </a:pPr>
+            <a:r>
+              <a:t>LANGCHAIN4J SUPERVISOR</a:t>
+            </a:r>
+          </a:p>
+        </p:txBody>
+      </p:sp>
+      <p:sp>
+        <p:nvSpPr>
+          <p:cNvPr id="30" name="TextBox 29"/>
+          <p:cNvSpPr txBox="1"/>
+          <p:nvPr/>
+        </p:nvSpPr>
+        <p:spPr>
+          <a:xfrm>
+            <a:off x="5486400" y="3264408"/>
+            <a:ext cx="3291840" cy="320040"/>
+          </a:xfrm>
+          <a:prstGeom prst="rect">
+            <a:avLst/>
+          </a:prstGeom>
+          <a:noFill/>
+        </p:spPr>
+        <p:txBody>
+          <a:bodyPr wrap="square">
+            <a:spAutoFit/>
+          </a:bodyPr>
+          <a:lstStyle/>
+          <a:p>
+            <a:pPr algn="ctr">
+              <a:spcBef>
+                <a:spcPts val="0"/>
+              </a:spcBef>
+              <a:spcAft>
+                <a:spcPts val="0"/>
+              </a:spcAft>
+              <a:defRPr sz="1500" b="1">
                 <a:solidFill>
                   <a:srgbClr val="F8FAFC"/>
                 </a:solidFill>
@@ -4542,21 +4902,493 @@
               </a:defRPr>
             </a:pPr>
             <a:r>
-              <a:t>Supervisor → Sub-Agents → Label Mutations</a:t>
-            </a:r>
-          </a:p>
-        </p:txBody>
-      </p:sp>
-      <p:sp>
-        <p:nvSpPr>
-          <p:cNvPr id="24" name="Down Arrow 23"/>
+              <a:t>6 Sub-Agents</a:t>
+            </a:r>
+          </a:p>
+        </p:txBody>
+      </p:sp>
+      <p:sp>
+        <p:nvSpPr>
+          <p:cNvPr id="31" name="TextBox 30"/>
+          <p:cNvSpPr txBox="1"/>
+          <p:nvPr/>
+        </p:nvSpPr>
+        <p:spPr>
+          <a:xfrm>
+            <a:off x="5486400" y="3557016"/>
+            <a:ext cx="3291840" cy="274320"/>
+          </a:xfrm>
+          <a:prstGeom prst="rect">
+            <a:avLst/>
+          </a:prstGeom>
+          <a:noFill/>
+        </p:spPr>
+        <p:txBody>
+          <a:bodyPr wrap="square">
+            <a:spAutoFit/>
+          </a:bodyPr>
+          <a:lstStyle/>
+          <a:p>
+            <a:pPr algn="ctr">
+              <a:spcBef>
+                <a:spcPts val="0"/>
+              </a:spcBef>
+              <a:spcAft>
+                <a:spcPts val="0"/>
+              </a:spcAft>
+              <a:defRPr sz="1100" b="0">
+                <a:solidFill>
+                  <a:srgbClr val="94A3B8"/>
+                </a:solidFill>
+                <a:latin typeface="Segoe UI"/>
+              </a:defRPr>
+            </a:pPr>
+            <a:r>
+              <a:t>Triage · Defer · Delegate</a:t>
+            </a:r>
+          </a:p>
+        </p:txBody>
+      </p:sp>
+      <p:sp>
+        <p:nvSpPr>
+          <p:cNvPr id="32" name="TextBox 31"/>
+          <p:cNvSpPr txBox="1"/>
+          <p:nvPr/>
+        </p:nvSpPr>
+        <p:spPr>
+          <a:xfrm>
+            <a:off x="5486400" y="3730752"/>
+            <a:ext cx="3291840" cy="274320"/>
+          </a:xfrm>
+          <a:prstGeom prst="rect">
+            <a:avLst/>
+          </a:prstGeom>
+          <a:noFill/>
+        </p:spPr>
+        <p:txBody>
+          <a:bodyPr wrap="square">
+            <a:spAutoFit/>
+          </a:bodyPr>
+          <a:lstStyle/>
+          <a:p>
+            <a:pPr algn="ctr">
+              <a:spcBef>
+                <a:spcPts val="0"/>
+              </a:spcBef>
+              <a:spcAft>
+                <a:spcPts val="0"/>
+              </a:spcAft>
+              <a:defRPr sz="1100" b="0">
+                <a:solidFill>
+                  <a:srgbClr val="94A3B8"/>
+                </a:solidFill>
+                <a:latin typeface="Segoe UI"/>
+              </a:defRPr>
+            </a:pPr>
+            <a:r>
+              <a:t>Classify · Scope · Wellness</a:t>
+            </a:r>
+          </a:p>
+        </p:txBody>
+      </p:sp>
+      <p:sp>
+        <p:nvSpPr>
+          <p:cNvPr id="33" name="TextBox 32"/>
+          <p:cNvSpPr txBox="1"/>
+          <p:nvPr/>
+        </p:nvSpPr>
+        <p:spPr>
+          <a:xfrm>
+            <a:off x="5486400" y="3886200"/>
+            <a:ext cx="3291840" cy="201168"/>
+          </a:xfrm>
+          <a:prstGeom prst="rect">
+            <a:avLst/>
+          </a:prstGeom>
+          <a:noFill/>
+        </p:spPr>
+        <p:txBody>
+          <a:bodyPr wrap="square">
+            <a:spAutoFit/>
+          </a:bodyPr>
+          <a:lstStyle/>
+          <a:p>
+            <a:pPr algn="ctr">
+              <a:spcBef>
+                <a:spcPts val="0"/>
+              </a:spcBef>
+              <a:spcAft>
+                <a:spcPts val="0"/>
+              </a:spcAft>
+              <a:defRPr sz="900" b="0">
+                <a:solidFill>
+                  <a:srgbClr val="94A3B8"/>
+                </a:solidFill>
+                <a:latin typeface="Segoe UI"/>
+              </a:defRPr>
+            </a:pPr>
+            <a:r>
+              <a:t>max 15 invocations · SUMMARY</a:t>
+            </a:r>
+          </a:p>
+        </p:txBody>
+      </p:sp>
+      <p:sp>
+        <p:nvSpPr>
+          <p:cNvPr id="34" name="Rounded Rectangle 33"/>
           <p:cNvSpPr/>
           <p:nvPr/>
         </p:nvSpPr>
         <p:spPr>
           <a:xfrm>
-            <a:off x="6812280" y="3794760"/>
-            <a:ext cx="182880" cy="640080"/>
+            <a:off x="9052560" y="2880360"/>
+            <a:ext cx="2194560" cy="1234440"/>
+          </a:xfrm>
+          <a:prstGeom prst="roundRect">
+            <a:avLst>
+              <a:gd name="adj" fmla="val 15000"/>
+            </a:avLst>
+          </a:prstGeom>
+          <a:solidFill>
+            <a:srgbClr val="2F0F16"/>
+          </a:solidFill>
+          <a:ln w="19050">
+            <a:solidFill>
+              <a:srgbClr val="EC4C6F"/>
+            </a:solidFill>
+          </a:ln>
+          <a:effectLst/>
+        </p:spPr>
+        <p:style>
+          <a:lnRef idx="1">
+            <a:schemeClr val="accent1"/>
+          </a:lnRef>
+          <a:fillRef idx="3">
+            <a:schemeClr val="accent1"/>
+          </a:fillRef>
+          <a:effectRef idx="2">
+            <a:schemeClr val="accent1"/>
+          </a:effectRef>
+          <a:fontRef idx="minor">
+            <a:schemeClr val="lt1"/>
+          </a:fontRef>
+        </p:style>
+        <p:txBody>
+          <a:bodyPr rtlCol="0" anchor="ctr"/>
+          <a:lstStyle/>
+          <a:p>
+            <a:pPr algn="ctr"/>
+          </a:p>
+        </p:txBody>
+      </p:sp>
+      <p:sp>
+        <p:nvSpPr>
+          <p:cNvPr id="35" name="TextBox 34"/>
+          <p:cNvSpPr txBox="1"/>
+          <p:nvPr/>
+        </p:nvSpPr>
+        <p:spPr>
+          <a:xfrm>
+            <a:off x="9052560" y="2971800"/>
+            <a:ext cx="2194560" cy="274320"/>
+          </a:xfrm>
+          <a:prstGeom prst="rect">
+            <a:avLst/>
+          </a:prstGeom>
+          <a:noFill/>
+        </p:spPr>
+        <p:txBody>
+          <a:bodyPr wrap="square">
+            <a:spAutoFit/>
+          </a:bodyPr>
+          <a:lstStyle/>
+          <a:p>
+            <a:pPr algn="ctr">
+              <a:spcBef>
+                <a:spcPts val="0"/>
+              </a:spcBef>
+              <a:spcAft>
+                <a:spcPts val="0"/>
+              </a:spcAft>
+              <a:defRPr sz="1100" b="1">
+                <a:solidFill>
+                  <a:srgbClr val="EC4C6F"/>
+                </a:solidFill>
+                <a:latin typeface="Segoe UI"/>
+              </a:defRPr>
+            </a:pPr>
+            <a:r>
+              <a:t>@Tool METHODS</a:t>
+            </a:r>
+          </a:p>
+        </p:txBody>
+      </p:sp>
+      <p:sp>
+        <p:nvSpPr>
+          <p:cNvPr id="36" name="TextBox 35"/>
+          <p:cNvSpPr txBox="1"/>
+          <p:nvPr/>
+        </p:nvSpPr>
+        <p:spPr>
+          <a:xfrm>
+            <a:off x="9052560" y="3264408"/>
+            <a:ext cx="2194560" cy="320040"/>
+          </a:xfrm>
+          <a:prstGeom prst="rect">
+            <a:avLst/>
+          </a:prstGeom>
+          <a:noFill/>
+        </p:spPr>
+        <p:txBody>
+          <a:bodyPr wrap="square">
+            <a:spAutoFit/>
+          </a:bodyPr>
+          <a:lstStyle/>
+          <a:p>
+            <a:pPr algn="ctr">
+              <a:spcBef>
+                <a:spcPts val="0"/>
+              </a:spcBef>
+              <a:spcAft>
+                <a:spcPts val="0"/>
+              </a:spcAft>
+              <a:defRPr sz="1400" b="1">
+                <a:solidFill>
+                  <a:srgbClr val="F8FAFC"/>
+                </a:solidFill>
+                <a:latin typeface="Segoe UI"/>
+              </a:defRPr>
+            </a:pPr>
+            <a:r>
+              <a:t>Label Mutations</a:t>
+            </a:r>
+          </a:p>
+        </p:txBody>
+      </p:sp>
+      <p:sp>
+        <p:nvSpPr>
+          <p:cNvPr id="37" name="TextBox 36"/>
+          <p:cNvSpPr txBox="1"/>
+          <p:nvPr/>
+        </p:nvSpPr>
+        <p:spPr>
+          <a:xfrm>
+            <a:off x="9052560" y="3557016"/>
+            <a:ext cx="2194560" cy="274320"/>
+          </a:xfrm>
+          <a:prstGeom prst="rect">
+            <a:avLst/>
+          </a:prstGeom>
+          <a:noFill/>
+        </p:spPr>
+        <p:txBody>
+          <a:bodyPr wrap="square">
+            <a:spAutoFit/>
+          </a:bodyPr>
+          <a:lstStyle/>
+          <a:p>
+            <a:pPr algn="ctr">
+              <a:spcBef>
+                <a:spcPts val="0"/>
+              </a:spcBef>
+              <a:spcAft>
+                <a:spcPts val="0"/>
+              </a:spcAft>
+              <a:defRPr sz="1000" b="0">
+                <a:solidFill>
+                  <a:srgbClr val="94A3B8"/>
+                </a:solidFill>
+                <a:latin typeface="Segoe UI"/>
+              </a:defRPr>
+            </a:pPr>
+            <a:r>
+              <a:t>AddLabels · RemoveLabels</a:t>
+            </a:r>
+          </a:p>
+        </p:txBody>
+      </p:sp>
+      <p:sp>
+        <p:nvSpPr>
+          <p:cNvPr id="38" name="TextBox 37"/>
+          <p:cNvSpPr txBox="1"/>
+          <p:nvPr/>
+        </p:nvSpPr>
+        <p:spPr>
+          <a:xfrm>
+            <a:off x="9052560" y="3721608"/>
+            <a:ext cx="2194560" cy="274320"/>
+          </a:xfrm>
+          <a:prstGeom prst="rect">
+            <a:avLst/>
+          </a:prstGeom>
+          <a:noFill/>
+        </p:spPr>
+        <p:txBody>
+          <a:bodyPr wrap="square">
+            <a:spAutoFit/>
+          </a:bodyPr>
+          <a:lstStyle/>
+          <a:p>
+            <a:pPr algn="ctr">
+              <a:spcBef>
+                <a:spcPts val="0"/>
+              </a:spcBef>
+              <a:spcAft>
+                <a:spcPts val="0"/>
+              </a:spcAft>
+              <a:defRPr sz="1000" b="0">
+                <a:solidFill>
+                  <a:srgbClr val="94A3B8"/>
+                </a:solidFill>
+                <a:latin typeface="Segoe UI"/>
+              </a:defRPr>
+            </a:pPr>
+            <a:r>
+              <a:t>Comment · Unassign</a:t>
+            </a:r>
+          </a:p>
+        </p:txBody>
+      </p:sp>
+      <p:sp>
+        <p:nvSpPr>
+          <p:cNvPr id="39" name="TextBox 38"/>
+          <p:cNvSpPr txBox="1"/>
+          <p:nvPr/>
+        </p:nvSpPr>
+        <p:spPr>
+          <a:xfrm>
+            <a:off x="9052560" y="3867912"/>
+            <a:ext cx="2194560" cy="228600"/>
+          </a:xfrm>
+          <a:prstGeom prst="rect">
+            <a:avLst/>
+          </a:prstGeom>
+          <a:noFill/>
+        </p:spPr>
+        <p:txBody>
+          <a:bodyPr wrap="square">
+            <a:spAutoFit/>
+          </a:bodyPr>
+          <a:lstStyle/>
+          <a:p>
+            <a:pPr algn="ctr">
+              <a:spcBef>
+                <a:spcPts val="0"/>
+              </a:spcBef>
+              <a:spcAft>
+                <a:spcPts val="0"/>
+              </a:spcAft>
+              <a:defRPr sz="1000" b="0">
+                <a:solidFill>
+                  <a:srgbClr val="94A3B8"/>
+                </a:solidFill>
+                <a:latin typeface="Segoe UI"/>
+              </a:defRPr>
+            </a:pPr>
+            <a:r>
+              <a:t>SetBody · SetUpdatedAt</a:t>
+            </a:r>
+          </a:p>
+        </p:txBody>
+      </p:sp>
+      <p:sp>
+        <p:nvSpPr>
+          <p:cNvPr id="40" name="Right Arrow 39"/>
+          <p:cNvSpPr/>
+          <p:nvPr/>
+        </p:nvSpPr>
+        <p:spPr>
+          <a:xfrm>
+            <a:off x="5230368" y="3406140"/>
+            <a:ext cx="237744" cy="182880"/>
+          </a:xfrm>
+          <a:prstGeom prst="rightArrow">
+            <a:avLst/>
+          </a:prstGeom>
+          <a:solidFill>
+            <a:srgbClr val="475569"/>
+          </a:solidFill>
+          <a:ln>
+            <a:noFill/>
+          </a:ln>
+          <a:effectLst/>
+        </p:spPr>
+        <p:style>
+          <a:lnRef idx="1">
+            <a:schemeClr val="accent1"/>
+          </a:lnRef>
+          <a:fillRef idx="3">
+            <a:schemeClr val="accent1"/>
+          </a:fillRef>
+          <a:effectRef idx="2">
+            <a:schemeClr val="accent1"/>
+          </a:effectRef>
+          <a:fontRef idx="minor">
+            <a:schemeClr val="lt1"/>
+          </a:fontRef>
+        </p:style>
+        <p:txBody>
+          <a:bodyPr rtlCol="0" anchor="ctr"/>
+          <a:lstStyle/>
+          <a:p>
+            <a:pPr algn="ctr"/>
+          </a:p>
+        </p:txBody>
+      </p:sp>
+      <p:sp>
+        <p:nvSpPr>
+          <p:cNvPr id="41" name="Right Arrow 40"/>
+          <p:cNvSpPr/>
+          <p:nvPr/>
+        </p:nvSpPr>
+        <p:spPr>
+          <a:xfrm>
+            <a:off x="8796528" y="3406140"/>
+            <a:ext cx="237744" cy="182880"/>
+          </a:xfrm>
+          <a:prstGeom prst="rightArrow">
+            <a:avLst/>
+          </a:prstGeom>
+          <a:solidFill>
+            <a:srgbClr val="475569"/>
+          </a:solidFill>
+          <a:ln>
+            <a:noFill/>
+          </a:ln>
+          <a:effectLst/>
+        </p:spPr>
+        <p:style>
+          <a:lnRef idx="1">
+            <a:schemeClr val="accent1"/>
+          </a:lnRef>
+          <a:fillRef idx="3">
+            <a:schemeClr val="accent1"/>
+          </a:fillRef>
+          <a:effectRef idx="2">
+            <a:schemeClr val="accent1"/>
+          </a:effectRef>
+          <a:fontRef idx="minor">
+            <a:schemeClr val="lt1"/>
+          </a:fontRef>
+        </p:style>
+        <p:txBody>
+          <a:bodyPr rtlCol="0" anchor="ctr"/>
+          <a:lstStyle/>
+          <a:p>
+            <a:pPr algn="ctr"/>
+          </a:p>
+        </p:txBody>
+      </p:sp>
+      <p:sp>
+        <p:nvSpPr>
+          <p:cNvPr id="42" name="Down Arrow 41"/>
+          <p:cNvSpPr/>
+          <p:nvPr/>
+        </p:nvSpPr>
+        <p:spPr>
+          <a:xfrm>
+            <a:off x="10058400" y="4133088"/>
+            <a:ext cx="182880" cy="576072"/>
           </a:xfrm>
           <a:prstGeom prst="downArrow">
             <a:avLst/>
@@ -4593,13 +5425,13 @@
       </p:sp>
       <p:sp>
         <p:nvSpPr>
-          <p:cNvPr id="25" name="Rounded Rectangle 24"/>
+          <p:cNvPr id="43" name="Rounded Rectangle 42"/>
           <p:cNvSpPr/>
           <p:nvPr/>
         </p:nvSpPr>
         <p:spPr>
           <a:xfrm>
-            <a:off x="2377440" y="4434840"/>
+            <a:off x="2377440" y="4727448"/>
             <a:ext cx="2011680" cy="777240"/>
           </a:xfrm>
           <a:prstGeom prst="roundRect">
@@ -4641,13 +5473,13 @@
       </p:sp>
       <p:sp>
         <p:nvSpPr>
-          <p:cNvPr id="26" name="TextBox 25"/>
+          <p:cNvPr id="44" name="TextBox 43"/>
           <p:cNvSpPr txBox="1"/>
           <p:nvPr/>
         </p:nvSpPr>
         <p:spPr>
           <a:xfrm>
-            <a:off x="2377440" y="4636008"/>
+            <a:off x="2377440" y="4928616"/>
             <a:ext cx="2011680" cy="365760"/>
           </a:xfrm>
           <a:prstGeom prst="rect">
@@ -4683,13 +5515,13 @@
       </p:sp>
       <p:sp>
         <p:nvSpPr>
-          <p:cNvPr id="27" name="Rounded Rectangle 26"/>
+          <p:cNvPr id="45" name="Rounded Rectangle 44"/>
           <p:cNvSpPr/>
           <p:nvPr/>
         </p:nvSpPr>
         <p:spPr>
           <a:xfrm>
-            <a:off x="4736592" y="4434840"/>
+            <a:off x="4736592" y="4727448"/>
             <a:ext cx="2011680" cy="777240"/>
           </a:xfrm>
           <a:prstGeom prst="roundRect">
@@ -4731,13 +5563,13 @@
       </p:sp>
       <p:sp>
         <p:nvSpPr>
-          <p:cNvPr id="28" name="TextBox 27"/>
+          <p:cNvPr id="46" name="TextBox 45"/>
           <p:cNvSpPr txBox="1"/>
           <p:nvPr/>
         </p:nvSpPr>
         <p:spPr>
           <a:xfrm>
-            <a:off x="4736592" y="4636008"/>
+            <a:off x="4736592" y="4928616"/>
             <a:ext cx="2011680" cy="365760"/>
           </a:xfrm>
           <a:prstGeom prst="rect">
@@ -4773,13 +5605,13 @@
       </p:sp>
       <p:sp>
         <p:nvSpPr>
-          <p:cNvPr id="29" name="Rounded Rectangle 28"/>
+          <p:cNvPr id="47" name="Rounded Rectangle 46"/>
           <p:cNvSpPr/>
           <p:nvPr/>
         </p:nvSpPr>
         <p:spPr>
           <a:xfrm>
-            <a:off x="7095744" y="4434840"/>
+            <a:off x="7095744" y="4727448"/>
             <a:ext cx="2011680" cy="777240"/>
           </a:xfrm>
           <a:prstGeom prst="roundRect">
@@ -4821,13 +5653,13 @@
       </p:sp>
       <p:sp>
         <p:nvSpPr>
-          <p:cNvPr id="30" name="TextBox 29"/>
+          <p:cNvPr id="48" name="TextBox 47"/>
           <p:cNvSpPr txBox="1"/>
           <p:nvPr/>
         </p:nvSpPr>
         <p:spPr>
           <a:xfrm>
-            <a:off x="7095744" y="4636008"/>
+            <a:off x="7095744" y="4928616"/>
             <a:ext cx="2011680" cy="365760"/>
           </a:xfrm>
           <a:prstGeom prst="rect">
@@ -4863,13 +5695,13 @@
       </p:sp>
       <p:sp>
         <p:nvSpPr>
-          <p:cNvPr id="31" name="Rounded Rectangle 30"/>
+          <p:cNvPr id="49" name="Rounded Rectangle 48"/>
           <p:cNvSpPr/>
           <p:nvPr/>
         </p:nvSpPr>
         <p:spPr>
           <a:xfrm>
-            <a:off x="9454896" y="4434840"/>
+            <a:off x="9454896" y="4727448"/>
             <a:ext cx="2011680" cy="777240"/>
           </a:xfrm>
           <a:prstGeom prst="roundRect">
@@ -4911,13 +5743,13 @@
       </p:sp>
       <p:sp>
         <p:nvSpPr>
-          <p:cNvPr id="32" name="TextBox 31"/>
+          <p:cNvPr id="50" name="TextBox 49"/>
           <p:cNvSpPr txBox="1"/>
           <p:nvPr/>
         </p:nvSpPr>
         <p:spPr>
           <a:xfrm>
-            <a:off x="9454896" y="4636008"/>
+            <a:off x="9454896" y="4928616"/>
             <a:ext cx="2011680" cy="365760"/>
           </a:xfrm>
           <a:prstGeom prst="rect">
@@ -4953,13 +5785,13 @@
       </p:sp>
       <p:sp>
         <p:nvSpPr>
-          <p:cNvPr id="33" name="Right Arrow 32"/>
+          <p:cNvPr id="51" name="Right Arrow 50"/>
           <p:cNvSpPr/>
           <p:nvPr/>
         </p:nvSpPr>
         <p:spPr>
           <a:xfrm>
-            <a:off x="4407408" y="4732020"/>
+            <a:off x="4407408" y="5024628"/>
             <a:ext cx="310896" cy="182880"/>
           </a:xfrm>
           <a:prstGeom prst="rightArrow">
@@ -4997,13 +5829,13 @@
       </p:sp>
       <p:sp>
         <p:nvSpPr>
-          <p:cNvPr id="34" name="Right Arrow 33"/>
+          <p:cNvPr id="52" name="Right Arrow 51"/>
           <p:cNvSpPr/>
           <p:nvPr/>
         </p:nvSpPr>
         <p:spPr>
           <a:xfrm>
-            <a:off x="6766560" y="4732020"/>
+            <a:off x="6766560" y="5024628"/>
             <a:ext cx="310896" cy="182880"/>
           </a:xfrm>
           <a:prstGeom prst="rightArrow">
@@ -5041,13 +5873,13 @@
       </p:sp>
       <p:sp>
         <p:nvSpPr>
-          <p:cNvPr id="35" name="Right Arrow 34"/>
+          <p:cNvPr id="53" name="Right Arrow 52"/>
           <p:cNvSpPr/>
           <p:nvPr/>
         </p:nvSpPr>
         <p:spPr>
           <a:xfrm>
-            <a:off x="9125712" y="4732020"/>
+            <a:off x="9125712" y="5024628"/>
             <a:ext cx="310896" cy="182880"/>
           </a:xfrm>
           <a:prstGeom prst="rightArrow">
@@ -5085,13 +5917,13 @@
       </p:sp>
       <p:sp>
         <p:nvSpPr>
-          <p:cNvPr id="36" name="TextBox 35"/>
+          <p:cNvPr id="54" name="TextBox 53"/>
           <p:cNvSpPr txBox="1"/>
           <p:nvPr/>
         </p:nvSpPr>
         <p:spPr>
           <a:xfrm>
-            <a:off x="0" y="5806440"/>
+            <a:off x="0" y="5897880"/>
             <a:ext cx="12191695" cy="274320"/>
           </a:xfrm>
           <a:prstGeom prst="rect">
@@ -5112,7 +5944,7 @@
               <a:spcAft>
                 <a:spcPts val="0"/>
               </a:spcAft>
-              <a:defRPr sz="1300" b="0">
+              <a:defRPr sz="1200" b="0">
                 <a:solidFill>
                   <a:srgbClr val="475569"/>
                 </a:solidFill>
@@ -5120,7 +5952,7 @@
               </a:defRPr>
             </a:pPr>
             <a:r>
-              <a:t>Deterministic first  →  AI acts  →  Recalculate  →  Persist</a:t>
+              <a:t>Deterministic metrics  →  Pre-pass guarantees the drop  →  AI rebalances  →  Recalculate  →  Persist</a:t>
             </a:r>
           </a:p>
         </p:txBody>
